--- a/presentation/deck/SDM_5분선별_가능성검토.pptx
+++ b/presentation/deck/SDM_5분선별_가능성검토.pptx
@@ -4367,7 +4367,7 @@
         <p:spPr>
           <a:xfrm>
             <a:off x="2011680" y="1444752"/>
-            <a:ext cx="8138160" cy="3686108"/>
+            <a:ext cx="8138160" cy="3362975"/>
           </a:xfrm>
           <a:prstGeom prst="rect">
             <a:avLst/>
